--- a/Images/Extract-EMF-Images-In-PPTX/.NET/Extract-EMF-Images/Data/Input.pptx
+++ b/Images/Extract-EMF-Images-In-PPTX/.NET/Extract-EMF-Images/Data/Input.pptx
@@ -259,7 +259,7 @@
           <a:p>
             <a:fld id="{1ED755B5-FE1F-41B5-B6A6-227917FA140F}" type="datetimeFigureOut">
               <a:rPr lang="en-US" smtClean="0"/>
-              <a:t>9/2/2025</a:t>
+              <a:t>1/29/2026</a:t>
             </a:fld>
             <a:endParaRPr lang="en-US"/>
           </a:p>
@@ -457,7 +457,7 @@
           <a:p>
             <a:fld id="{1ED755B5-FE1F-41B5-B6A6-227917FA140F}" type="datetimeFigureOut">
               <a:rPr lang="en-US" smtClean="0"/>
-              <a:t>9/2/2025</a:t>
+              <a:t>1/29/2026</a:t>
             </a:fld>
             <a:endParaRPr lang="en-US"/>
           </a:p>
@@ -665,7 +665,7 @@
           <a:p>
             <a:fld id="{1ED755B5-FE1F-41B5-B6A6-227917FA140F}" type="datetimeFigureOut">
               <a:rPr lang="en-US" smtClean="0"/>
-              <a:t>9/2/2025</a:t>
+              <a:t>1/29/2026</a:t>
             </a:fld>
             <a:endParaRPr lang="en-US"/>
           </a:p>
@@ -863,7 +863,7 @@
           <a:p>
             <a:fld id="{1ED755B5-FE1F-41B5-B6A6-227917FA140F}" type="datetimeFigureOut">
               <a:rPr lang="en-US" smtClean="0"/>
-              <a:t>9/2/2025</a:t>
+              <a:t>1/29/2026</a:t>
             </a:fld>
             <a:endParaRPr lang="en-US"/>
           </a:p>
@@ -1138,7 +1138,7 @@
           <a:p>
             <a:fld id="{1ED755B5-FE1F-41B5-B6A6-227917FA140F}" type="datetimeFigureOut">
               <a:rPr lang="en-US" smtClean="0"/>
-              <a:t>9/2/2025</a:t>
+              <a:t>1/29/2026</a:t>
             </a:fld>
             <a:endParaRPr lang="en-US"/>
           </a:p>
@@ -1403,7 +1403,7 @@
           <a:p>
             <a:fld id="{1ED755B5-FE1F-41B5-B6A6-227917FA140F}" type="datetimeFigureOut">
               <a:rPr lang="en-US" smtClean="0"/>
-              <a:t>9/2/2025</a:t>
+              <a:t>1/29/2026</a:t>
             </a:fld>
             <a:endParaRPr lang="en-US"/>
           </a:p>
@@ -1815,7 +1815,7 @@
           <a:p>
             <a:fld id="{1ED755B5-FE1F-41B5-B6A6-227917FA140F}" type="datetimeFigureOut">
               <a:rPr lang="en-US" smtClean="0"/>
-              <a:t>9/2/2025</a:t>
+              <a:t>1/29/2026</a:t>
             </a:fld>
             <a:endParaRPr lang="en-US"/>
           </a:p>
@@ -1956,7 +1956,7 @@
           <a:p>
             <a:fld id="{1ED755B5-FE1F-41B5-B6A6-227917FA140F}" type="datetimeFigureOut">
               <a:rPr lang="en-US" smtClean="0"/>
-              <a:t>9/2/2025</a:t>
+              <a:t>1/29/2026</a:t>
             </a:fld>
             <a:endParaRPr lang="en-US"/>
           </a:p>
@@ -2069,7 +2069,7 @@
           <a:p>
             <a:fld id="{1ED755B5-FE1F-41B5-B6A6-227917FA140F}" type="datetimeFigureOut">
               <a:rPr lang="en-US" smtClean="0"/>
-              <a:t>9/2/2025</a:t>
+              <a:t>1/29/2026</a:t>
             </a:fld>
             <a:endParaRPr lang="en-US"/>
           </a:p>
@@ -2129,6 +2129,36 @@
           </a:p>
         </p:txBody>
       </p:sp>
+      <p:pic>
+        <p:nvPicPr>
+          <p:cNvPr id="5" name="Picture 4">
+            <a:extLst>
+              <a:ext uri="{FF2B5EF4-FFF2-40B4-BE49-F238E27FC236}">
+                <a16:creationId xmlns:a16="http://schemas.microsoft.com/office/drawing/2014/main" id="{ACF55ECB-537F-B867-E768-8CF56217F7E9}"/>
+              </a:ext>
+            </a:extLst>
+          </p:cNvPr>
+          <p:cNvPicPr>
+            <a:picLocks noChangeAspect="1"/>
+          </p:cNvPicPr>
+          <p:nvPr userDrawn="1"/>
+        </p:nvPicPr>
+        <p:blipFill>
+          <a:blip r:embed="rId2"/>
+          <a:stretch>
+            <a:fillRect/>
+          </a:stretch>
+        </p:blipFill>
+        <p:spPr>
+          <a:xfrm>
+            <a:off x="4177357" y="1822163"/>
+            <a:ext cx="2609523" cy="2609523"/>
+          </a:xfrm>
+          <a:prstGeom prst="rect">
+            <a:avLst/>
+          </a:prstGeom>
+        </p:spPr>
+      </p:pic>
     </p:spTree>
     <p:extLst>
       <p:ext uri="{BB962C8B-B14F-4D97-AF65-F5344CB8AC3E}">
@@ -2380,7 +2410,7 @@
           <a:p>
             <a:fld id="{1ED755B5-FE1F-41B5-B6A6-227917FA140F}" type="datetimeFigureOut">
               <a:rPr lang="en-US" smtClean="0"/>
-              <a:t>9/2/2025</a:t>
+              <a:t>1/29/2026</a:t>
             </a:fld>
             <a:endParaRPr lang="en-US"/>
           </a:p>
@@ -2668,7 +2698,7 @@
           <a:p>
             <a:fld id="{1ED755B5-FE1F-41B5-B6A6-227917FA140F}" type="datetimeFigureOut">
               <a:rPr lang="en-US" smtClean="0"/>
-              <a:t>9/2/2025</a:t>
+              <a:t>1/29/2026</a:t>
             </a:fld>
             <a:endParaRPr lang="en-US"/>
           </a:p>
@@ -2909,7 +2939,7 @@
           <a:p>
             <a:fld id="{1ED755B5-FE1F-41B5-B6A6-227917FA140F}" type="datetimeFigureOut">
               <a:rPr lang="en-US" smtClean="0"/>
-              <a:t>9/2/2025</a:t>
+              <a:t>1/29/2026</a:t>
             </a:fld>
             <a:endParaRPr lang="en-US"/>
           </a:p>
@@ -3005,6 +3035,36 @@
           </a:p>
         </p:txBody>
       </p:sp>
+      <p:pic>
+        <p:nvPicPr>
+          <p:cNvPr id="7" name="Picture 6">
+            <a:extLst>
+              <a:ext uri="{FF2B5EF4-FFF2-40B4-BE49-F238E27FC236}">
+                <a16:creationId xmlns:a16="http://schemas.microsoft.com/office/drawing/2014/main" id="{99FF0835-C646-06B2-6320-8772089C4531}"/>
+              </a:ext>
+            </a:extLst>
+          </p:cNvPr>
+          <p:cNvPicPr>
+            <a:picLocks noChangeAspect="1"/>
+          </p:cNvPicPr>
+          <p:nvPr userDrawn="1"/>
+        </p:nvPicPr>
+        <p:blipFill>
+          <a:blip r:embed="rId13"/>
+          <a:stretch>
+            <a:fillRect/>
+          </a:stretch>
+        </p:blipFill>
+        <p:spPr>
+          <a:xfrm>
+            <a:off x="7406846" y="1027906"/>
+            <a:ext cx="4346222" cy="4346222"/>
+          </a:xfrm>
+          <a:prstGeom prst="rect">
+            <a:avLst/>
+          </a:prstGeom>
+        </p:spPr>
+      </p:pic>
     </p:spTree>
     <p:extLst>
       <p:ext uri="{BB962C8B-B14F-4D97-AF65-F5344CB8AC3E}">
@@ -3350,66 +3410,6 @@
           <a:xfrm>
             <a:off x="650225" y="2046492"/>
             <a:ext cx="1778015" cy="2496404"/>
-          </a:xfrm>
-          <a:prstGeom prst="rect">
-            <a:avLst/>
-          </a:prstGeom>
-        </p:spPr>
-      </p:pic>
-      <p:pic>
-        <p:nvPicPr>
-          <p:cNvPr id="3" name="Picture 2">
-            <a:extLst>
-              <a:ext uri="{FF2B5EF4-FFF2-40B4-BE49-F238E27FC236}">
-                <a16:creationId xmlns:a16="http://schemas.microsoft.com/office/drawing/2014/main" id="{ACF55ECB-537F-B867-E768-8CF56217F7E9}"/>
-              </a:ext>
-            </a:extLst>
-          </p:cNvPr>
-          <p:cNvPicPr>
-            <a:picLocks noChangeAspect="1"/>
-          </p:cNvPicPr>
-          <p:nvPr/>
-        </p:nvPicPr>
-        <p:blipFill>
-          <a:blip r:embed="rId3"/>
-          <a:stretch>
-            <a:fillRect/>
-          </a:stretch>
-        </p:blipFill>
-        <p:spPr>
-          <a:xfrm>
-            <a:off x="4177357" y="1822163"/>
-            <a:ext cx="2609523" cy="2609523"/>
-          </a:xfrm>
-          <a:prstGeom prst="rect">
-            <a:avLst/>
-          </a:prstGeom>
-        </p:spPr>
-      </p:pic>
-      <p:pic>
-        <p:nvPicPr>
-          <p:cNvPr id="6" name="Picture 5">
-            <a:extLst>
-              <a:ext uri="{FF2B5EF4-FFF2-40B4-BE49-F238E27FC236}">
-                <a16:creationId xmlns:a16="http://schemas.microsoft.com/office/drawing/2014/main" id="{99FF0835-C646-06B2-6320-8772089C4531}"/>
-              </a:ext>
-            </a:extLst>
-          </p:cNvPr>
-          <p:cNvPicPr>
-            <a:picLocks noChangeAspect="1"/>
-          </p:cNvPicPr>
-          <p:nvPr/>
-        </p:nvPicPr>
-        <p:blipFill>
-          <a:blip r:embed="rId4"/>
-          <a:stretch>
-            <a:fillRect/>
-          </a:stretch>
-        </p:blipFill>
-        <p:spPr>
-          <a:xfrm>
-            <a:off x="7397609" y="640080"/>
-            <a:ext cx="4346222" cy="4346222"/>
           </a:xfrm>
           <a:prstGeom prst="rect">
             <a:avLst/>

--- a/Images/Extract-EMF-Images-In-PPTX/.NET/Extract-EMF-Images/Data/Input.pptx
+++ b/Images/Extract-EMF-Images-In-PPTX/.NET/Extract-EMF-Images/Data/Input.pptx
@@ -3408,14 +3408,141 @@
         </p:blipFill>
         <p:spPr>
           <a:xfrm>
-            <a:off x="650225" y="2046492"/>
-            <a:ext cx="1778015" cy="2496404"/>
+            <a:off x="3550742" y="5112775"/>
+            <a:ext cx="834445" cy="1171594"/>
           </a:xfrm>
           <a:prstGeom prst="rect">
             <a:avLst/>
           </a:prstGeom>
         </p:spPr>
       </p:pic>
+      <p:grpSp>
+        <p:nvGrpSpPr>
+          <p:cNvPr id="5" name="Group 4">
+            <a:extLst>
+              <a:ext uri="{FF2B5EF4-FFF2-40B4-BE49-F238E27FC236}">
+                <a16:creationId xmlns:a16="http://schemas.microsoft.com/office/drawing/2014/main" id="{15C1555A-1121-E8AC-2724-160E6DD7E4AB}"/>
+              </a:ext>
+            </a:extLst>
+          </p:cNvPr>
+          <p:cNvGrpSpPr/>
+          <p:nvPr/>
+        </p:nvGrpSpPr>
+        <p:grpSpPr>
+          <a:xfrm>
+            <a:off x="491613" y="1238864"/>
+            <a:ext cx="2319116" cy="3952568"/>
+            <a:chOff x="511277" y="2104103"/>
+            <a:chExt cx="2319116" cy="3952568"/>
+          </a:xfrm>
+        </p:grpSpPr>
+        <p:sp>
+          <p:nvSpPr>
+            <p:cNvPr id="2" name="Rectangle 1">
+              <a:extLst>
+                <a:ext uri="{FF2B5EF4-FFF2-40B4-BE49-F238E27FC236}">
+                  <a16:creationId xmlns:a16="http://schemas.microsoft.com/office/drawing/2014/main" id="{5DE20196-CD7B-C9C8-9648-4579E4B357BB}"/>
+                </a:ext>
+              </a:extLst>
+            </p:cNvPr>
+            <p:cNvSpPr/>
+            <p:nvPr/>
+          </p:nvSpPr>
+          <p:spPr>
+            <a:xfrm>
+              <a:off x="511277" y="2104103"/>
+              <a:ext cx="2202426" cy="1592826"/>
+            </a:xfrm>
+            <a:prstGeom prst="rect">
+              <a:avLst/>
+            </a:prstGeom>
+            <a:blipFill dpi="0" rotWithShape="1">
+              <a:blip r:embed="rId3"/>
+              <a:srcRect/>
+              <a:stretch>
+                <a:fillRect/>
+              </a:stretch>
+            </a:blipFill>
+          </p:spPr>
+          <p:style>
+            <a:lnRef idx="2">
+              <a:schemeClr val="accent1">
+                <a:shade val="15000"/>
+              </a:schemeClr>
+            </a:lnRef>
+            <a:fillRef idx="1">
+              <a:schemeClr val="accent1"/>
+            </a:fillRef>
+            <a:effectRef idx="0">
+              <a:schemeClr val="accent1"/>
+            </a:effectRef>
+            <a:fontRef idx="minor">
+              <a:schemeClr val="lt1"/>
+            </a:fontRef>
+          </p:style>
+          <p:txBody>
+            <a:bodyPr rtlCol="0" anchor="ctr"/>
+            <a:lstStyle/>
+            <a:p>
+              <a:pPr algn="ctr"/>
+              <a:endParaRPr lang="en-US"/>
+            </a:p>
+          </p:txBody>
+        </p:sp>
+        <p:sp>
+          <p:nvSpPr>
+            <p:cNvPr id="3" name="Rectangle 2">
+              <a:extLst>
+                <a:ext uri="{FF2B5EF4-FFF2-40B4-BE49-F238E27FC236}">
+                  <a16:creationId xmlns:a16="http://schemas.microsoft.com/office/drawing/2014/main" id="{9C896E9C-51C9-9339-3C33-C774B7FA286F}"/>
+                </a:ext>
+              </a:extLst>
+            </p:cNvPr>
+            <p:cNvSpPr/>
+            <p:nvPr/>
+          </p:nvSpPr>
+          <p:spPr>
+            <a:xfrm>
+              <a:off x="511277" y="4306529"/>
+              <a:ext cx="2319116" cy="1750142"/>
+            </a:xfrm>
+            <a:prstGeom prst="rect">
+              <a:avLst/>
+            </a:prstGeom>
+            <a:blipFill dpi="0" rotWithShape="1">
+              <a:blip r:embed="rId4"/>
+              <a:srcRect/>
+              <a:stretch>
+                <a:fillRect/>
+              </a:stretch>
+            </a:blipFill>
+          </p:spPr>
+          <p:style>
+            <a:lnRef idx="2">
+              <a:schemeClr val="accent1">
+                <a:shade val="15000"/>
+              </a:schemeClr>
+            </a:lnRef>
+            <a:fillRef idx="1">
+              <a:schemeClr val="accent1"/>
+            </a:fillRef>
+            <a:effectRef idx="0">
+              <a:schemeClr val="accent1"/>
+            </a:effectRef>
+            <a:fontRef idx="minor">
+              <a:schemeClr val="lt1"/>
+            </a:fontRef>
+          </p:style>
+          <p:txBody>
+            <a:bodyPr rtlCol="0" anchor="ctr"/>
+            <a:lstStyle/>
+            <a:p>
+              <a:pPr algn="ctr"/>
+              <a:endParaRPr lang="en-US"/>
+            </a:p>
+          </p:txBody>
+        </p:sp>
+      </p:grpSp>
     </p:spTree>
     <p:extLst>
       <p:ext uri="{BB962C8B-B14F-4D97-AF65-F5344CB8AC3E}">
